--- a/docs/ahg-2026/kit/step-cards/7-take-it-home.pptx
+++ b/docs/ahg-2026/kit/step-cards/7-take-it-home.pptx
@@ -17,6 +17,8 @@
     <p:sldId id="265" r:id="rId16"/>
     <p:sldId id="266" r:id="rId17"/>
     <p:sldId id="267" r:id="rId18"/>
+    <p:sldId id="268" r:id="rId19"/>
+    <p:sldId id="269" r:id="rId20"/>
   </p:sldIdLst>
   <p:sldSz cx="12191695" cy="6858000" type="screen4x3"/>
   <p:notesSz cx="6858000" cy="9144000"/>
@@ -3295,7 +3297,7 @@
               <a:rPr sz="3600" b="1" lang="en-US">
                 <a:latin typeface="Arial"/>
               </a:rPr>
-              <a:t>Your win</a:t>
+              <a:t>Your win (1 of 2)</a:t>
             </a:r>
           </a:p>
         </p:txBody>
@@ -3331,6 +3333,120 @@
                 <a:latin typeface="Arial"/>
               </a:rPr>
               <a:t>You came in with a problem. You are leaving with an agent, a team and a plan.</a:t>
+            </a:r>
+          </a:p>
+          <a:p>
+            <a:pPr marL="0" indent="0">
+              <a:spcAft>
+                <a:spcPts val="600"/>
+              </a:spcAft>
+              <a:buNone/>
+            </a:pPr>
+            <a:r>
+              <a:rPr sz="2000" b="0" lang="en-US">
+                <a:latin typeface="Arial"/>
+              </a:rPr>
+              <a:t>And you can now:</a:t>
+            </a:r>
+          </a:p>
+          <a:p>
+            <a:pPr lvl="1">
+              <a:spcAft>
+                <a:spcPts val="600"/>
+              </a:spcAft>
+              <a:buNone/>
+            </a:pPr>
+            <a:r>
+              <a:rPr sz="2000" b="0" lang="en-US">
+                <a:latin typeface="Arial"/>
+              </a:rPr>
+              <a:t>1. </a:t>
+            </a:r>
+            <a:r>
+              <a:rPr sz="2000" b="0" lang="en-US">
+                <a:latin typeface="Arial"/>
+              </a:rPr>
+              <a:t>Describe an accessibility task as an agent. You wrote four versions of one.</a:t>
+            </a:r>
+          </a:p>
+          <a:p>
+            <a:pPr lvl="1">
+              <a:spcAft>
+                <a:spcPts val="600"/>
+              </a:spcAft>
+              <a:buNone/>
+            </a:pPr>
+            <a:r>
+              <a:rPr sz="2000" b="0" lang="en-US">
+                <a:latin typeface="Arial"/>
+              </a:rPr>
+              <a:t>2. </a:t>
+            </a:r>
+            <a:r>
+              <a:rPr sz="2000" b="0" lang="en-US">
+                <a:latin typeface="Arial"/>
+              </a:rPr>
+              <a:t>Ground an agent's answers in checker evidence, citing WCAG 2.2. That was your before and after.</a:t>
+            </a:r>
+          </a:p>
+          <a:p>
+            <a:pPr lvl="1">
+              <a:spcAft>
+                <a:spcPts val="600"/>
+              </a:spcAft>
+              <a:buNone/>
+            </a:pPr>
+            <a:r>
+              <a:rPr sz="2000" b="0" lang="en-US">
+                <a:latin typeface="Arial"/>
+              </a:rPr>
+              <a:t>3. </a:t>
+            </a:r>
+            <a:r>
+              <a:rPr sz="2000" b="0" lang="en-US">
+                <a:latin typeface="Arial"/>
+              </a:rPr>
+              <a:t>Name the barriers no checker finds, and write the review step that catches them. That is your agent's Human review.</a:t>
+            </a:r>
+          </a:p>
+          <a:p>
+            <a:pPr lvl="1">
+              <a:spcAft>
+                <a:spcPts val="600"/>
+              </a:spcAft>
+              <a:buNone/>
+            </a:pPr>
+            <a:r>
+              <a:rPr sz="2000" b="0" lang="en-US">
+                <a:latin typeface="Arial"/>
+              </a:rPr>
+              <a:t>4. </a:t>
+            </a:r>
+            <a:r>
+              <a:rPr sz="2000" b="0" lang="en-US">
+                <a:latin typeface="Arial"/>
+              </a:rPr>
+              <a:t>Explain how a team of specialists and a coordinator scales the work. Your agent has a section in the team report.</a:t>
+            </a:r>
+          </a:p>
+          <a:p>
+            <a:pPr lvl="1">
+              <a:spcAft>
+                <a:spcPts val="600"/>
+              </a:spcAft>
+              <a:buNone/>
+            </a:pPr>
+            <a:r>
+              <a:rPr sz="2000" b="0" lang="en-US">
+                <a:latin typeface="Arial"/>
+              </a:rPr>
+              <a:t>5. </a:t>
+            </a:r>
+            <a:r>
+              <a:rPr sz="2000" b="0" lang="en-US">
+                <a:latin typeface="Arial"/>
+              </a:rPr>
+              <a:t>Contribute to an open-source project, credited in your name. Your agent is in the collection.</a:t>
             </a:r>
           </a:p>
         </p:txBody>
@@ -3377,6 +3493,94 @@
               <a:rPr sz="3600" b="1" lang="en-US">
                 <a:latin typeface="Arial"/>
               </a:rPr>
+              <a:t>Your win (2 of 2)</a:t>
+            </a:r>
+          </a:p>
+        </p:txBody>
+      </p:sp>
+      <p:sp>
+        <p:nvSpPr>
+          <p:cNvPr id="3" name="Content Placeholder 2"/>
+          <p:cNvSpPr>
+            <a:spLocks noGrp="1"/>
+          </p:cNvSpPr>
+          <p:nvPr>
+            <p:ph idx="1"/>
+          </p:nvPr>
+        </p:nvSpPr>
+        <p:spPr>
+          <a:xfrm>
+            <a:off x="548640" y="1554480"/>
+            <a:ext cx="11064240" cy="4937760"/>
+          </a:xfrm>
+        </p:spPr>
+        <p:txBody>
+          <a:bodyPr wrap="square"/>
+          <a:lstStyle/>
+          <a:p>
+            <a:pPr lvl="1">
+              <a:spcAft>
+                <a:spcPts val="600"/>
+              </a:spcAft>
+              <a:buNone/>
+            </a:pPr>
+            <a:r>
+              <a:rPr sz="2000" b="0" lang="en-US">
+                <a:latin typeface="Arial"/>
+              </a:rPr>
+              <a:t>6. </a:t>
+            </a:r>
+            <a:r>
+              <a:rPr sz="2000" b="0" lang="en-US">
+                <a:latin typeface="Arial"/>
+              </a:rPr>
+              <a:t>Plan one workflow for your own campus in the next 30 days. That is this plan.</a:t>
+            </a:r>
+          </a:p>
+        </p:txBody>
+      </p:sp>
+    </p:spTree>
+  </p:cSld>
+  <p:clrMapOvr>
+    <a:masterClrMapping/>
+  </p:clrMapOvr>
+</p:sld>
+</file>
+
+<file path=ppt/slides/slide13.xml><?xml version="1.0" encoding="utf-8"?>
+<p:sld xmlns:a="http://schemas.openxmlformats.org/drawingml/2006/main" xmlns:p="http://schemas.openxmlformats.org/presentationml/2006/main" xmlns:r="http://schemas.openxmlformats.org/officeDocument/2006/relationships">
+  <p:cSld>
+    <p:spTree>
+      <p:nvGrpSpPr>
+        <p:cNvPr id="1" name=""/>
+        <p:cNvGrpSpPr/>
+        <p:nvPr/>
+      </p:nvGrpSpPr>
+      <p:grpSpPr/>
+      <p:sp>
+        <p:nvSpPr>
+          <p:cNvPr id="2" name="Title 1"/>
+          <p:cNvSpPr>
+            <a:spLocks noGrp="1"/>
+          </p:cNvSpPr>
+          <p:nvPr>
+            <p:ph type="title"/>
+          </p:nvPr>
+        </p:nvSpPr>
+        <p:spPr>
+          <a:xfrm>
+            <a:off x="548640" y="365760"/>
+            <a:ext cx="11064240" cy="1097280"/>
+          </a:xfrm>
+        </p:spPr>
+        <p:txBody>
+          <a:bodyPr wrap="square"/>
+          <a:lstStyle/>
+          <a:p>
+            <a:r>
+              <a:rPr sz="3600" b="1" lang="en-US">
+                <a:latin typeface="Arial"/>
+              </a:rPr>
               <a:t>On Monday</a:t>
             </a:r>
           </a:p>
@@ -3420,6 +3624,101 @@
                 <a:hlinkClick r:id="rId2"/>
               </a:rPr>
               <a:t>support@community-access.org</a:t>
+            </a:r>
+            <a:r>
+              <a:rPr sz="2000" b="0" lang="en-US">
+                <a:latin typeface="Arial"/>
+              </a:rPr>
+              <a:t>.</a:t>
+            </a:r>
+          </a:p>
+        </p:txBody>
+      </p:sp>
+    </p:spTree>
+  </p:cSld>
+  <p:clrMapOvr>
+    <a:masterClrMapping/>
+  </p:clrMapOvr>
+</p:sld>
+</file>
+
+<file path=ppt/slides/slide14.xml><?xml version="1.0" encoding="utf-8"?>
+<p:sld xmlns:a="http://schemas.openxmlformats.org/drawingml/2006/main" xmlns:p="http://schemas.openxmlformats.org/presentationml/2006/main" xmlns:r="http://schemas.openxmlformats.org/officeDocument/2006/relationships">
+  <p:cSld>
+    <p:spTree>
+      <p:nvGrpSpPr>
+        <p:cNvPr id="1" name=""/>
+        <p:cNvGrpSpPr/>
+        <p:nvPr/>
+      </p:nvGrpSpPr>
+      <p:grpSpPr/>
+      <p:sp>
+        <p:nvSpPr>
+          <p:cNvPr id="2" name="Title 1"/>
+          <p:cNvSpPr>
+            <a:spLocks noGrp="1"/>
+          </p:cNvSpPr>
+          <p:nvPr>
+            <p:ph type="title"/>
+          </p:nvPr>
+        </p:nvSpPr>
+        <p:spPr>
+          <a:xfrm>
+            <a:off x="548640" y="365760"/>
+            <a:ext cx="11064240" cy="1097280"/>
+          </a:xfrm>
+        </p:spPr>
+        <p:txBody>
+          <a:bodyPr wrap="square"/>
+          <a:lstStyle/>
+          <a:p>
+            <a:r>
+              <a:rPr sz="3600" b="1" lang="en-US">
+                <a:latin typeface="Arial"/>
+              </a:rPr>
+              <a:t>Sources</a:t>
+            </a:r>
+          </a:p>
+        </p:txBody>
+      </p:sp>
+      <p:sp>
+        <p:nvSpPr>
+          <p:cNvPr id="3" name="Content Placeholder 2"/>
+          <p:cNvSpPr>
+            <a:spLocks noGrp="1"/>
+          </p:cNvSpPr>
+          <p:nvPr>
+            <p:ph idx="1"/>
+          </p:nvPr>
+        </p:nvSpPr>
+        <p:spPr>
+          <a:xfrm>
+            <a:off x="548640" y="1554480"/>
+            <a:ext cx="11064240" cy="4937760"/>
+          </a:xfrm>
+        </p:spPr>
+        <p:txBody>
+          <a:bodyPr wrap="square"/>
+          <a:lstStyle/>
+          <a:p>
+            <a:pPr marL="0" indent="0">
+              <a:spcAft>
+                <a:spcPts val="600"/>
+              </a:spcAft>
+              <a:buNone/>
+            </a:pPr>
+            <a:r>
+              <a:rPr sz="2000" b="0" lang="en-US">
+                <a:latin typeface="Arial"/>
+              </a:rPr>
+              <a:t>Checked on 29 October 2026: the keys on this card are in the kit's README, with their sources. The standard every agent cites is </a:t>
+            </a:r>
+            <a:r>
+              <a:rPr sz="2000" b="0" lang="en-US">
+                <a:latin typeface="Arial"/>
+                <a:hlinkClick r:id="rId2"/>
+              </a:rPr>
+              <a:t>WCAG 2.2</a:t>
             </a:r>
             <a:r>
               <a:rPr sz="2000" b="0" lang="en-US">

--- a/docs/ahg-2026/kit/step-cards/7-take-it-home.pptx
+++ b/docs/ahg-2026/kit/step-cards/7-take-it-home.pptx
@@ -3616,7 +3616,19 @@
               <a:rPr sz="2000" b="0" lang="en-US">
                 <a:latin typeface="Arial"/>
               </a:rPr>
-              <a:t>Keep the kit. Everything in it works after today, with any AI assistant and the checkers you already have. To keep using the full Accessibility Agents project on your own laptop, read accessibility-agents.md in the kit, or community-access.org/start.html for step-by-step setup in each AI app. Help is at </a:t>
+              <a:t>To write your next agent on your own, follow </a:t>
+            </a:r>
+            <a:r>
+              <a:rPr sz="2000" b="0" lang="en-US">
+                <a:latin typeface="Consolas"/>
+              </a:rPr>
+              <a:t>write-your-own-agent.md</a:t>
+            </a:r>
+            <a:r>
+              <a:rPr sz="2000" b="0" lang="en-US">
+                <a:latin typeface="Arial"/>
+              </a:rPr>
+              <a:t> in the kit: eight steps, from a blank file to a shared agent, in any assistant. Keep the kit. Everything in it works after today, with any AI assistant and the checkers you already have. To keep using the full Accessibility Agents project on your own laptop, read accessibility-agents.md in the kit, or community-access.org/start.html for step-by-step setup in each AI app. Help is at </a:t>
             </a:r>
             <a:r>
               <a:rPr sz="2000" b="0" lang="en-US">
